--- a/prezentacie/p03w.pptx
+++ b/prezentacie/p03w.pptx
@@ -250,7 +250,7 @@
           <a:p>
             <a:fld id="{10052495-8BC8-4CFB-94B1-B0429F101A0D}" type="datetimeFigureOut">
               <a:rPr lang="sk-SK" smtClean="0"/>
-              <a:t>14. 9. 2025</a:t>
+              <a:t>15. 9. 2026</a:t>
             </a:fld>
             <a:endParaRPr lang="sk-SK"/>
           </a:p>
@@ -420,7 +420,7 @@
           <a:p>
             <a:fld id="{10052495-8BC8-4CFB-94B1-B0429F101A0D}" type="datetimeFigureOut">
               <a:rPr lang="sk-SK" smtClean="0"/>
-              <a:t>14. 9. 2025</a:t>
+              <a:t>15. 9. 2026</a:t>
             </a:fld>
             <a:endParaRPr lang="sk-SK"/>
           </a:p>
@@ -600,7 +600,7 @@
           <a:p>
             <a:fld id="{10052495-8BC8-4CFB-94B1-B0429F101A0D}" type="datetimeFigureOut">
               <a:rPr lang="sk-SK" smtClean="0"/>
-              <a:t>14. 9. 2025</a:t>
+              <a:t>15. 9. 2026</a:t>
             </a:fld>
             <a:endParaRPr lang="sk-SK"/>
           </a:p>
@@ -770,7 +770,7 @@
           <a:p>
             <a:fld id="{10052495-8BC8-4CFB-94B1-B0429F101A0D}" type="datetimeFigureOut">
               <a:rPr lang="sk-SK" smtClean="0"/>
-              <a:t>14. 9. 2025</a:t>
+              <a:t>15. 9. 2026</a:t>
             </a:fld>
             <a:endParaRPr lang="sk-SK"/>
           </a:p>
@@ -1016,7 +1016,7 @@
           <a:p>
             <a:fld id="{10052495-8BC8-4CFB-94B1-B0429F101A0D}" type="datetimeFigureOut">
               <a:rPr lang="sk-SK" smtClean="0"/>
-              <a:t>14. 9. 2025</a:t>
+              <a:t>15. 9. 2026</a:t>
             </a:fld>
             <a:endParaRPr lang="sk-SK"/>
           </a:p>
@@ -1248,7 +1248,7 @@
           <a:p>
             <a:fld id="{10052495-8BC8-4CFB-94B1-B0429F101A0D}" type="datetimeFigureOut">
               <a:rPr lang="sk-SK" smtClean="0"/>
-              <a:t>14. 9. 2025</a:t>
+              <a:t>15. 9. 2026</a:t>
             </a:fld>
             <a:endParaRPr lang="sk-SK"/>
           </a:p>
@@ -1615,7 +1615,7 @@
           <a:p>
             <a:fld id="{10052495-8BC8-4CFB-94B1-B0429F101A0D}" type="datetimeFigureOut">
               <a:rPr lang="sk-SK" smtClean="0"/>
-              <a:t>14. 9. 2025</a:t>
+              <a:t>15. 9. 2026</a:t>
             </a:fld>
             <a:endParaRPr lang="sk-SK"/>
           </a:p>
@@ -1733,7 +1733,7 @@
           <a:p>
             <a:fld id="{10052495-8BC8-4CFB-94B1-B0429F101A0D}" type="datetimeFigureOut">
               <a:rPr lang="sk-SK" smtClean="0"/>
-              <a:t>14. 9. 2025</a:t>
+              <a:t>15. 9. 2026</a:t>
             </a:fld>
             <a:endParaRPr lang="sk-SK"/>
           </a:p>
@@ -1828,7 +1828,7 @@
           <a:p>
             <a:fld id="{10052495-8BC8-4CFB-94B1-B0429F101A0D}" type="datetimeFigureOut">
               <a:rPr lang="sk-SK" smtClean="0"/>
-              <a:t>14. 9. 2025</a:t>
+              <a:t>15. 9. 2026</a:t>
             </a:fld>
             <a:endParaRPr lang="sk-SK"/>
           </a:p>
@@ -2105,7 +2105,7 @@
           <a:p>
             <a:fld id="{10052495-8BC8-4CFB-94B1-B0429F101A0D}" type="datetimeFigureOut">
               <a:rPr lang="sk-SK" smtClean="0"/>
-              <a:t>14. 9. 2025</a:t>
+              <a:t>15. 9. 2026</a:t>
             </a:fld>
             <a:endParaRPr lang="sk-SK"/>
           </a:p>
@@ -2362,7 +2362,7 @@
           <a:p>
             <a:fld id="{10052495-8BC8-4CFB-94B1-B0429F101A0D}" type="datetimeFigureOut">
               <a:rPr lang="sk-SK" smtClean="0"/>
-              <a:t>14. 9. 2025</a:t>
+              <a:t>15. 9. 2026</a:t>
             </a:fld>
             <a:endParaRPr lang="sk-SK"/>
           </a:p>
@@ -2575,7 +2575,7 @@
           <a:p>
             <a:fld id="{10052495-8BC8-4CFB-94B1-B0429F101A0D}" type="datetimeFigureOut">
               <a:rPr lang="sk-SK" smtClean="0"/>
-              <a:t>14. 9. 2025</a:t>
+              <a:t>15. 9. 2026</a:t>
             </a:fld>
             <a:endParaRPr lang="sk-SK"/>
           </a:p>
@@ -3517,7 +3517,15 @@
             </a:br>
             <a:r>
               <a:rPr lang="sk-SK" b="1" dirty="0"/>
-              <a:t>Ing. Jozef Wagner PhD.</a:t>
+              <a:t>Ing. Jozef Wagner</a:t>
+            </a:r>
+            <a:r>
+              <a:rPr lang="en-US" b="1" dirty="0"/>
+              <a:t>,</a:t>
+            </a:r>
+            <a:r>
+              <a:rPr lang="sk-SK" b="1" dirty="0"/>
+              <a:t> PhD.</a:t>
             </a:r>
           </a:p>
           <a:p>
@@ -4200,51 +4208,135 @@
               <a:buNone/>
             </a:pPr>
             <a:r>
-              <a:rPr lang="pl-PL" dirty="0" err="1"/>
+              <a:rPr lang="pl-PL" dirty="0" err="1">
+                <a:solidFill>
+                  <a:srgbClr val="C00000"/>
+                </a:solidFill>
+                <a:highlight>
+                  <a:srgbClr val="00FFFF"/>
+                </a:highlight>
+              </a:rPr>
               <a:t>Iterácia</a:t>
             </a:r>
             <a:r>
-              <a:rPr lang="pl-PL" dirty="0"/>
+              <a:rPr lang="pl-PL" dirty="0">
+                <a:solidFill>
+                  <a:srgbClr val="C00000"/>
+                </a:solidFill>
+                <a:highlight>
+                  <a:srgbClr val="00FFFF"/>
+                </a:highlight>
+              </a:rPr>
               <a:t> je proces </a:t>
             </a:r>
             <a:r>
-              <a:rPr lang="pl-PL" dirty="0" err="1"/>
+              <a:rPr lang="pl-PL" dirty="0" err="1">
+                <a:solidFill>
+                  <a:srgbClr val="C00000"/>
+                </a:solidFill>
+                <a:highlight>
+                  <a:srgbClr val="00FFFF"/>
+                </a:highlight>
+              </a:rPr>
               <a:t>opakovania</a:t>
             </a:r>
             <a:r>
-              <a:rPr lang="pl-PL" dirty="0"/>
+              <a:rPr lang="pl-PL" dirty="0">
+                <a:solidFill>
+                  <a:srgbClr val="C00000"/>
+                </a:solidFill>
+                <a:highlight>
+                  <a:srgbClr val="00FFFF"/>
+                </a:highlight>
+              </a:rPr>
               <a:t> </a:t>
             </a:r>
             <a:r>
-              <a:rPr lang="pl-PL" dirty="0" err="1"/>
+              <a:rPr lang="pl-PL" dirty="0" err="1">
+                <a:solidFill>
+                  <a:srgbClr val="C00000"/>
+                </a:solidFill>
+                <a:highlight>
+                  <a:srgbClr val="00FFFF"/>
+                </a:highlight>
+              </a:rPr>
               <a:t>určitej</a:t>
             </a:r>
             <a:r>
-              <a:rPr lang="pl-PL" dirty="0"/>
+              <a:rPr lang="pl-PL" dirty="0">
+                <a:solidFill>
+                  <a:srgbClr val="C00000"/>
+                </a:solidFill>
+                <a:highlight>
+                  <a:srgbClr val="00FFFF"/>
+                </a:highlight>
+              </a:rPr>
               <a:t> </a:t>
             </a:r>
             <a:r>
-              <a:rPr lang="pl-PL" dirty="0" err="1"/>
+              <a:rPr lang="pl-PL" dirty="0" err="1">
+                <a:solidFill>
+                  <a:srgbClr val="C00000"/>
+                </a:solidFill>
+                <a:highlight>
+                  <a:srgbClr val="00FFFF"/>
+                </a:highlight>
+              </a:rPr>
               <a:t>operácie</a:t>
             </a:r>
             <a:r>
-              <a:rPr lang="pl-PL" dirty="0"/>
+              <a:rPr lang="pl-PL" dirty="0">
+                <a:solidFill>
+                  <a:srgbClr val="C00000"/>
+                </a:solidFill>
+                <a:highlight>
+                  <a:srgbClr val="00FFFF"/>
+                </a:highlight>
+              </a:rPr>
               <a:t> </a:t>
             </a:r>
             <a:r>
-              <a:rPr lang="pl-PL" dirty="0" err="1"/>
+              <a:rPr lang="pl-PL" dirty="0" err="1">
+                <a:solidFill>
+                  <a:srgbClr val="C00000"/>
+                </a:solidFill>
+                <a:highlight>
+                  <a:srgbClr val="00FFFF"/>
+                </a:highlight>
+              </a:rPr>
               <a:t>pomocou</a:t>
             </a:r>
             <a:r>
-              <a:rPr lang="pl-PL" dirty="0"/>
+              <a:rPr lang="pl-PL" dirty="0">
+                <a:solidFill>
+                  <a:srgbClr val="C00000"/>
+                </a:solidFill>
+                <a:highlight>
+                  <a:srgbClr val="00FFFF"/>
+                </a:highlight>
+              </a:rPr>
               <a:t> </a:t>
             </a:r>
             <a:r>
-              <a:rPr lang="pl-PL" dirty="0" err="1"/>
+              <a:rPr lang="pl-PL" dirty="0" err="1">
+                <a:solidFill>
+                  <a:srgbClr val="C00000"/>
+                </a:solidFill>
+                <a:highlight>
+                  <a:srgbClr val="00FFFF"/>
+                </a:highlight>
+              </a:rPr>
               <a:t>cyklov</a:t>
             </a:r>
             <a:r>
-              <a:rPr lang="pl-PL" dirty="0"/>
+              <a:rPr lang="pl-PL" dirty="0">
+                <a:solidFill>
+                  <a:srgbClr val="C00000"/>
+                </a:solidFill>
+                <a:highlight>
+                  <a:srgbClr val="00FFFF"/>
+                </a:highlight>
+              </a:rPr>
               <a:t>.</a:t>
             </a:r>
           </a:p>
@@ -4256,54 +4348,141 @@
               <a:buNone/>
             </a:pPr>
             <a:r>
-              <a:rPr lang="pl-PL" dirty="0"/>
+              <a:rPr lang="pl-PL" dirty="0">
+                <a:solidFill>
+                  <a:srgbClr val="C00000"/>
+                </a:solidFill>
+                <a:highlight>
+                  <a:srgbClr val="00FFFF"/>
+                </a:highlight>
+              </a:rPr>
               <a:t>V </a:t>
             </a:r>
             <a:r>
-              <a:rPr lang="pl-PL" dirty="0" err="1"/>
+              <a:rPr lang="pl-PL" dirty="0" err="1">
+                <a:solidFill>
+                  <a:srgbClr val="C00000"/>
+                </a:solidFill>
+                <a:highlight>
+                  <a:srgbClr val="00FFFF"/>
+                </a:highlight>
+              </a:rPr>
               <a:t>Pythone</a:t>
             </a:r>
             <a:r>
-              <a:rPr lang="pl-PL" dirty="0"/>
+              <a:rPr lang="pl-PL" dirty="0">
+                <a:solidFill>
+                  <a:srgbClr val="C00000"/>
+                </a:solidFill>
+                <a:highlight>
+                  <a:srgbClr val="00FFFF"/>
+                </a:highlight>
+              </a:rPr>
               <a:t> </a:t>
             </a:r>
             <a:r>
-              <a:rPr lang="pl-PL" dirty="0" err="1"/>
+              <a:rPr lang="pl-PL" dirty="0" err="1">
+                <a:solidFill>
+                  <a:srgbClr val="C00000"/>
+                </a:solidFill>
+                <a:highlight>
+                  <a:srgbClr val="00FFFF"/>
+                </a:highlight>
+              </a:rPr>
               <a:t>iteráciu</a:t>
             </a:r>
             <a:r>
-              <a:rPr lang="pl-PL" dirty="0"/>
+              <a:rPr lang="pl-PL" dirty="0">
+                <a:solidFill>
+                  <a:srgbClr val="C00000"/>
+                </a:solidFill>
+                <a:highlight>
+                  <a:srgbClr val="00FFFF"/>
+                </a:highlight>
+              </a:rPr>
               <a:t> </a:t>
             </a:r>
             <a:r>
-              <a:rPr lang="pl-PL" dirty="0" err="1"/>
+              <a:rPr lang="pl-PL" dirty="0" err="1">
+                <a:solidFill>
+                  <a:srgbClr val="C00000"/>
+                </a:solidFill>
+                <a:highlight>
+                  <a:srgbClr val="00FFFF"/>
+                </a:highlight>
+              </a:rPr>
               <a:t>vykonávame</a:t>
             </a:r>
             <a:r>
-              <a:rPr lang="pl-PL" dirty="0"/>
+              <a:rPr lang="pl-PL" dirty="0">
+                <a:solidFill>
+                  <a:srgbClr val="C00000"/>
+                </a:solidFill>
+                <a:highlight>
+                  <a:srgbClr val="00FFFF"/>
+                </a:highlight>
+              </a:rPr>
               <a:t> </a:t>
             </a:r>
             <a:br>
-              <a:rPr lang="pl-PL" dirty="0"/>
+              <a:rPr lang="pl-PL" dirty="0">
+                <a:solidFill>
+                  <a:srgbClr val="C00000"/>
+                </a:solidFill>
+                <a:highlight>
+                  <a:srgbClr val="00FFFF"/>
+                </a:highlight>
+              </a:rPr>
             </a:br>
             <a:r>
-              <a:rPr lang="pl-PL" dirty="0" err="1"/>
+              <a:rPr lang="pl-PL" dirty="0" err="1">
+                <a:solidFill>
+                  <a:srgbClr val="C00000"/>
+                </a:solidFill>
+                <a:highlight>
+                  <a:srgbClr val="00FFFF"/>
+                </a:highlight>
+              </a:rPr>
               <a:t>pomocou</a:t>
             </a:r>
             <a:r>
-              <a:rPr lang="pl-PL" dirty="0"/>
+              <a:rPr lang="pl-PL" dirty="0">
+                <a:solidFill>
+                  <a:srgbClr val="C00000"/>
+                </a:solidFill>
+                <a:highlight>
+                  <a:srgbClr val="00FFFF"/>
+                </a:highlight>
+              </a:rPr>
               <a:t> </a:t>
             </a:r>
             <a:r>
-              <a:rPr lang="pl-PL" dirty="0" err="1"/>
+              <a:rPr lang="pl-PL" dirty="0" err="1">
+                <a:solidFill>
+                  <a:srgbClr val="C00000"/>
+                </a:solidFill>
+                <a:highlight>
+                  <a:srgbClr val="00FFFF"/>
+                </a:highlight>
+              </a:rPr>
               <a:t>cyklov</a:t>
             </a:r>
             <a:r>
-              <a:rPr lang="pl-PL" dirty="0"/>
+              <a:rPr lang="pl-PL" dirty="0">
+                <a:solidFill>
+                  <a:srgbClr val="C00000"/>
+                </a:solidFill>
+                <a:highlight>
+                  <a:srgbClr val="00FFFF"/>
+                </a:highlight>
+              </a:rPr>
               <a:t> </a:t>
             </a:r>
             <a:r>
               <a:rPr lang="sk-SK" dirty="0" err="1">
+                <a:solidFill>
+                  <a:srgbClr val="C00000"/>
+                </a:solidFill>
                 <a:highlight>
                   <a:srgbClr val="FFFF00"/>
                 </a:highlight>
@@ -4312,11 +4491,21 @@
               <a:t>for</a:t>
             </a:r>
             <a:r>
-              <a:rPr lang="sk-SK" dirty="0"/>
+              <a:rPr lang="sk-SK" dirty="0">
+                <a:solidFill>
+                  <a:srgbClr val="C00000"/>
+                </a:solidFill>
+                <a:highlight>
+                  <a:srgbClr val="00FFFF"/>
+                </a:highlight>
+              </a:rPr>
               <a:t> a </a:t>
             </a:r>
             <a:r>
               <a:rPr lang="sk-SK" dirty="0" err="1">
+                <a:solidFill>
+                  <a:srgbClr val="C00000"/>
+                </a:solidFill>
                 <a:highlight>
                   <a:srgbClr val="FFFF00"/>
                 </a:highlight>
@@ -4325,6 +4514,9 @@
               <a:t>while</a:t>
             </a:r>
             <a:endParaRPr lang="sk-SK" dirty="0">
+              <a:solidFill>
+                <a:srgbClr val="C00000"/>
+              </a:solidFill>
               <a:highlight>
                 <a:srgbClr val="FFFF00"/>
               </a:highlight>
@@ -4586,7 +4778,14 @@
           <a:lstStyle/>
           <a:p>
             <a:r>
-              <a:rPr lang="sk-SK" dirty="0"/>
+              <a:rPr lang="sk-SK" dirty="0">
+                <a:solidFill>
+                  <a:srgbClr val="C00000"/>
+                </a:solidFill>
+                <a:highlight>
+                  <a:srgbClr val="00FFFF"/>
+                </a:highlight>
+              </a:rPr>
               <a:t>Iterácia</a:t>
             </a:r>
           </a:p>
@@ -4758,40 +4957,84 @@
               <a:buNone/>
             </a:pPr>
             <a:r>
-              <a:rPr lang="sk-SK" dirty="0" err="1"/>
+              <a:rPr lang="sk-SK" dirty="0" err="1">
+                <a:solidFill>
+                  <a:srgbClr val="C00000"/>
+                </a:solidFill>
+                <a:highlight>
+                  <a:srgbClr val="00FFFF"/>
+                </a:highlight>
+              </a:rPr>
               <a:t>Rekurzia</a:t>
             </a:r>
             <a:r>
-              <a:rPr lang="sk-SK" dirty="0"/>
-              <a:t> je proces, pri ktorom funkcia volá </a:t>
-            </a:r>
-            <a:r>
-              <a:rPr lang="sk-SK"/>
-              <a:t>samú seba.</a:t>
-            </a:r>
-            <a:endParaRPr lang="sk-SK" dirty="0"/>
+              <a:rPr lang="sk-SK" dirty="0">
+                <a:solidFill>
+                  <a:srgbClr val="C00000"/>
+                </a:solidFill>
+                <a:highlight>
+                  <a:srgbClr val="00FFFF"/>
+                </a:highlight>
+              </a:rPr>
+              <a:t> je proces, pri ktorom funkcia volá samú seba.</a:t>
+            </a:r>
           </a:p>
           <a:p>
             <a:pPr marL="0" indent="0">
               <a:buNone/>
             </a:pPr>
             <a:r>
-              <a:rPr lang="sk-SK" dirty="0" err="1"/>
+              <a:rPr lang="sk-SK" dirty="0" err="1">
+                <a:solidFill>
+                  <a:srgbClr val="C00000"/>
+                </a:solidFill>
+                <a:highlight>
+                  <a:srgbClr val="00FFFF"/>
+                </a:highlight>
+              </a:rPr>
               <a:t>Rekurzia</a:t>
             </a:r>
             <a:r>
-              <a:rPr lang="sk-SK" dirty="0"/>
+              <a:rPr lang="sk-SK" dirty="0">
+                <a:solidFill>
+                  <a:srgbClr val="C00000"/>
+                </a:solidFill>
+                <a:highlight>
+                  <a:srgbClr val="00FFFF"/>
+                </a:highlight>
+              </a:rPr>
               <a:t> rozdeľuje problém na menšie </a:t>
             </a:r>
             <a:br>
-              <a:rPr lang="sk-SK" dirty="0"/>
+              <a:rPr lang="sk-SK" dirty="0">
+                <a:solidFill>
+                  <a:srgbClr val="C00000"/>
+                </a:solidFill>
+                <a:highlight>
+                  <a:srgbClr val="00FFFF"/>
+                </a:highlight>
+              </a:rPr>
             </a:br>
             <a:r>
-              <a:rPr lang="sk-SK" dirty="0" err="1"/>
+              <a:rPr lang="sk-SK" dirty="0" err="1">
+                <a:solidFill>
+                  <a:srgbClr val="C00000"/>
+                </a:solidFill>
+                <a:highlight>
+                  <a:srgbClr val="00FFFF"/>
+                </a:highlight>
+              </a:rPr>
               <a:t>podproblémy</a:t>
             </a:r>
             <a:r>
-              <a:rPr lang="sk-SK" dirty="0"/>
+              <a:rPr lang="sk-SK" dirty="0">
+                <a:solidFill>
+                  <a:srgbClr val="C00000"/>
+                </a:solidFill>
+                <a:highlight>
+                  <a:srgbClr val="00FFFF"/>
+                </a:highlight>
+              </a:rPr>
               <a:t> rovnakého typu.</a:t>
             </a:r>
           </a:p>
@@ -4998,10 +5241,24 @@
           <a:lstStyle/>
           <a:p>
             <a:r>
-              <a:rPr lang="sk-SK" dirty="0" err="1"/>
+              <a:rPr lang="sk-SK" dirty="0" err="1">
+                <a:solidFill>
+                  <a:srgbClr val="C00000"/>
+                </a:solidFill>
+                <a:highlight>
+                  <a:srgbClr val="00FFFF"/>
+                </a:highlight>
+              </a:rPr>
               <a:t>Rekurzia</a:t>
             </a:r>
-            <a:endParaRPr lang="sk-SK" dirty="0"/>
+            <a:endParaRPr lang="sk-SK" dirty="0">
+              <a:solidFill>
+                <a:srgbClr val="C00000"/>
+              </a:solidFill>
+              <a:highlight>
+                <a:srgbClr val="00FFFF"/>
+              </a:highlight>
+            </a:endParaRPr>
           </a:p>
         </p:txBody>
       </p:sp>
@@ -5081,61 +5338,152 @@
               <a:buNone/>
             </a:pPr>
             <a:r>
-              <a:rPr lang="sk-SK" dirty="0"/>
+              <a:rPr lang="sk-SK" dirty="0">
+                <a:solidFill>
+                  <a:srgbClr val="C00000"/>
+                </a:solidFill>
+                <a:highlight>
+                  <a:srgbClr val="00FFFF"/>
+                </a:highlight>
+              </a:rPr>
               <a:t>Rekurzívna funkcia má dve základné časti</a:t>
             </a:r>
           </a:p>
           <a:p>
             <a:pPr lvl="1"/>
             <a:r>
-              <a:rPr lang="sk-SK" sz="2800" b="1" dirty="0"/>
+              <a:rPr lang="sk-SK" sz="2800" b="1" dirty="0">
+                <a:solidFill>
+                  <a:srgbClr val="C00000"/>
+                </a:solidFill>
+                <a:highlight>
+                  <a:srgbClr val="00FFFF"/>
+                </a:highlight>
+              </a:rPr>
               <a:t>základný prípad</a:t>
             </a:r>
             <a:r>
-              <a:rPr lang="sk-SK" sz="2800" dirty="0"/>
+              <a:rPr lang="sk-SK" sz="2800" dirty="0">
+                <a:solidFill>
+                  <a:srgbClr val="C00000"/>
+                </a:solidFill>
+                <a:highlight>
+                  <a:srgbClr val="00FFFF"/>
+                </a:highlight>
+              </a:rPr>
               <a:t> (base </a:t>
             </a:r>
             <a:r>
-              <a:rPr lang="sk-SK" sz="2800" dirty="0" err="1"/>
+              <a:rPr lang="sk-SK" sz="2800" dirty="0" err="1">
+                <a:solidFill>
+                  <a:srgbClr val="C00000"/>
+                </a:solidFill>
+                <a:highlight>
+                  <a:srgbClr val="00FFFF"/>
+                </a:highlight>
+              </a:rPr>
               <a:t>case</a:t>
             </a:r>
             <a:r>
-              <a:rPr lang="sk-SK" sz="2800" dirty="0"/>
+              <a:rPr lang="sk-SK" sz="2800" dirty="0">
+                <a:solidFill>
+                  <a:srgbClr val="C00000"/>
+                </a:solidFill>
+                <a:highlight>
+                  <a:srgbClr val="00FFFF"/>
+                </a:highlight>
+              </a:rPr>
               <a:t>) – </a:t>
             </a:r>
             <a:r>
-              <a:rPr lang="sk-SK" sz="2800" dirty="0" err="1"/>
+              <a:rPr lang="sk-SK" sz="2800" dirty="0" err="1">
+                <a:solidFill>
+                  <a:srgbClr val="C00000"/>
+                </a:solidFill>
+                <a:highlight>
+                  <a:srgbClr val="00FFFF"/>
+                </a:highlight>
+              </a:rPr>
               <a:t>rekurzia</a:t>
             </a:r>
             <a:r>
-              <a:rPr lang="sk-SK" sz="2800" dirty="0"/>
+              <a:rPr lang="sk-SK" sz="2800" dirty="0">
+                <a:solidFill>
+                  <a:srgbClr val="C00000"/>
+                </a:solidFill>
+                <a:highlight>
+                  <a:srgbClr val="00FFFF"/>
+                </a:highlight>
+              </a:rPr>
               <a:t> sa zastaví</a:t>
             </a:r>
           </a:p>
           <a:p>
             <a:pPr lvl="1"/>
             <a:r>
-              <a:rPr lang="sk-SK" sz="2800" b="1" dirty="0"/>
+              <a:rPr lang="sk-SK" sz="2800" b="1" dirty="0">
+                <a:solidFill>
+                  <a:srgbClr val="C00000"/>
+                </a:solidFill>
+                <a:highlight>
+                  <a:srgbClr val="00FFFF"/>
+                </a:highlight>
+              </a:rPr>
               <a:t>rekurzívny prípad </a:t>
             </a:r>
             <a:r>
-              <a:rPr lang="sk-SK" sz="2800" dirty="0"/>
+              <a:rPr lang="sk-SK" sz="2800" dirty="0">
+                <a:solidFill>
+                  <a:srgbClr val="C00000"/>
+                </a:solidFill>
+                <a:highlight>
+                  <a:srgbClr val="00FFFF"/>
+                </a:highlight>
+              </a:rPr>
               <a:t>(</a:t>
             </a:r>
             <a:r>
-              <a:rPr lang="sk-SK" sz="2800" dirty="0" err="1"/>
+              <a:rPr lang="sk-SK" sz="2800" dirty="0" err="1">
+                <a:solidFill>
+                  <a:srgbClr val="C00000"/>
+                </a:solidFill>
+                <a:highlight>
+                  <a:srgbClr val="00FFFF"/>
+                </a:highlight>
+              </a:rPr>
               <a:t>recursive</a:t>
             </a:r>
             <a:r>
-              <a:rPr lang="sk-SK" sz="2800" dirty="0"/>
+              <a:rPr lang="sk-SK" sz="2800" dirty="0">
+                <a:solidFill>
+                  <a:srgbClr val="C00000"/>
+                </a:solidFill>
+                <a:highlight>
+                  <a:srgbClr val="00FFFF"/>
+                </a:highlight>
+              </a:rPr>
               <a:t> </a:t>
             </a:r>
             <a:r>
-              <a:rPr lang="sk-SK" sz="2800" dirty="0" err="1"/>
+              <a:rPr lang="sk-SK" sz="2800" dirty="0" err="1">
+                <a:solidFill>
+                  <a:srgbClr val="C00000"/>
+                </a:solidFill>
+                <a:highlight>
+                  <a:srgbClr val="00FFFF"/>
+                </a:highlight>
+              </a:rPr>
               <a:t>case</a:t>
             </a:r>
             <a:r>
-              <a:rPr lang="sk-SK" sz="2800" dirty="0"/>
+              <a:rPr lang="sk-SK" sz="2800" dirty="0">
+                <a:solidFill>
+                  <a:srgbClr val="C00000"/>
+                </a:solidFill>
+                <a:highlight>
+                  <a:srgbClr val="00FFFF"/>
+                </a:highlight>
+              </a:rPr>
               <a:t>) – funkcia volá samú seba</a:t>
             </a:r>
           </a:p>
@@ -5262,7 +5610,14 @@
               <a:buNone/>
             </a:pPr>
             <a:r>
-              <a:rPr lang="sk-SK" dirty="0"/>
+              <a:rPr lang="sk-SK" dirty="0">
+                <a:solidFill>
+                  <a:srgbClr val="C00000"/>
+                </a:solidFill>
+                <a:highlight>
+                  <a:srgbClr val="00FFFF"/>
+                </a:highlight>
+              </a:rPr>
               <a:t>Každý algoritmus v rekurzívnom tvare sa dá prepísať na tvar iteratívny. </a:t>
             </a:r>
           </a:p>
@@ -5274,8 +5629,19 @@
               <a:buNone/>
             </a:pPr>
             <a:r>
+              <a:rPr lang="sk-SK" dirty="0">
+                <a:solidFill>
+                  <a:srgbClr val="C00000"/>
+                </a:solidFill>
+                <a:highlight>
+                  <a:srgbClr val="00FFFF"/>
+                </a:highlight>
+              </a:rPr>
+              <a:t>Iteratívna verzia je obvykle efektívnejšia </a:t>
+            </a:r>
+            <a:r>
               <a:rPr lang="sk-SK" dirty="0"/>
-              <a:t>Iteratívna verzia je obvykle efektívnejšia - je rýchlejšia a zaberá menej pamäti. </a:t>
+              <a:t>- je rýchlejšia a zaberá menej pamäti. </a:t>
             </a:r>
           </a:p>
           <a:p>
@@ -5286,12 +5652,30 @@
               <a:buNone/>
             </a:pPr>
             <a:r>
-              <a:rPr lang="sk-SK" dirty="0" err="1"/>
+              <a:rPr lang="sk-SK" dirty="0" err="1">
+                <a:solidFill>
+                  <a:srgbClr val="C00000"/>
+                </a:solidFill>
+                <a:highlight>
+                  <a:srgbClr val="00FFFF"/>
+                </a:highlight>
+              </a:rPr>
               <a:t>Rekurziu</a:t>
             </a:r>
             <a:r>
+              <a:rPr lang="sk-SK" dirty="0">
+                <a:solidFill>
+                  <a:srgbClr val="C00000"/>
+                </a:solidFill>
+                <a:highlight>
+                  <a:srgbClr val="00FFFF"/>
+                </a:highlight>
+              </a:rPr>
+              <a:t> používame hlavne kvôli jej elegancii </a:t>
+            </a:r>
+            <a:r>
               <a:rPr lang="sk-SK" dirty="0"/>
-              <a:t> používame hlavne kvôli jej elegancii a jednoduchosti v niektorých prípadoch.</a:t>
+              <a:t>a jednoduchosti v niektorých prípadoch.</a:t>
             </a:r>
           </a:p>
           <a:p>
@@ -5494,19 +5878,47 @@
               <a:buNone/>
             </a:pPr>
             <a:r>
-              <a:rPr lang="sk-SK" dirty="0" err="1"/>
+              <a:rPr lang="sk-SK" dirty="0" err="1">
+                <a:solidFill>
+                  <a:srgbClr val="C00000"/>
+                </a:solidFill>
+                <a:highlight>
+                  <a:srgbClr val="00FFFF"/>
+                </a:highlight>
+              </a:rPr>
               <a:t>Python</a:t>
             </a:r>
             <a:r>
-              <a:rPr lang="sk-SK" dirty="0"/>
+              <a:rPr lang="sk-SK" dirty="0">
+                <a:solidFill>
+                  <a:srgbClr val="C00000"/>
+                </a:solidFill>
+                <a:highlight>
+                  <a:srgbClr val="00FFFF"/>
+                </a:highlight>
+              </a:rPr>
               <a:t> má predvolený limit </a:t>
             </a:r>
             <a:r>
-              <a:rPr lang="sk-SK" dirty="0" err="1"/>
+              <a:rPr lang="sk-SK" dirty="0" err="1">
+                <a:solidFill>
+                  <a:srgbClr val="C00000"/>
+                </a:solidFill>
+                <a:highlight>
+                  <a:srgbClr val="00FFFF"/>
+                </a:highlight>
+              </a:rPr>
               <a:t>rekurzie</a:t>
             </a:r>
             <a:r>
-              <a:rPr lang="sk-SK" dirty="0"/>
+              <a:rPr lang="sk-SK" dirty="0">
+                <a:solidFill>
+                  <a:srgbClr val="C00000"/>
+                </a:solidFill>
+                <a:highlight>
+                  <a:srgbClr val="00FFFF"/>
+                </a:highlight>
+              </a:rPr>
               <a:t> (1000 volaní)</a:t>
             </a:r>
           </a:p>
